--- a/.claude/skills/impact-ladder-pdf/output/2026-09-03-impact-ladder-wiedmann-winz.pptx
+++ b/.claude/skills/impact-ladder-pdf/output/2026-09-03-impact-ladder-wiedmann-winz.pptx
@@ -1223,7 +1223,7 @@
                 </a:solidFill>
                 <a:latin typeface="DM Sans"/>
               </a:rPr>
-              <a:t>Jede Abteilung bestellt anders</a:t>
+              <a:t>Jede Abteilung bestellt nach eigenem Muster</a:t>
             </a:r>
           </a:p>
           <a:p>
@@ -1245,7 +1245,7 @@
                 </a:solidFill>
                 <a:latin typeface="DM Sans"/>
               </a:rPr>
-              <a:t>Werkstatt, Büro und IT arbeiten mit gewachsenen Abläufen.</a:t>
+              <a:t>Werkstatt, Büro und IT arbeiten mit historisch gewachsenen Abläufen.</a:t>
             </a:r>
           </a:p>
         </p:txBody>
@@ -1382,7 +1382,7 @@
                 </a:solidFill>
                 <a:latin typeface="DM Sans"/>
               </a:rPr>
-              <a:t>Preisvergleich von Hand bei 2 bis 4 Anbietern</a:t>
+              <a:t>Preisvergleich läuft von Hand bei 2 bis 4 Anbietern</a:t>
             </a:r>
           </a:p>
           <a:p>
@@ -1404,7 +1404,7 @@
                 </a:solidFill>
                 <a:latin typeface="DM Sans"/>
               </a:rPr>
-              <a:t>Angebote werden je Bestellung einzeln gesucht und verglichen.</a:t>
+              <a:t>Für jede Bestellung werden Angebote einzeln gesucht und verglichen.</a:t>
             </a:r>
           </a:p>
         </p:txBody>
@@ -1541,7 +1541,7 @@
                 </a:solidFill>
                 <a:latin typeface="DM Sans"/>
               </a:rPr>
-              <a:t>Preise je Lieferant sehr unterschiedlich</a:t>
+              <a:t>Gleiche Teile kosten je Lieferant sehr unterschiedlich</a:t>
             </a:r>
           </a:p>
           <a:p>
@@ -1563,7 +1563,7 @@
                 </a:solidFill>
                 <a:latin typeface="DM Sans"/>
               </a:rPr>
-              <a:t>Beispiel: 450 Euro für ein Werkzeug, anderswo 225 Euro.</a:t>
+              <a:t>Beispiel aus dem Gespräch: 450 Euro für ein Werkzeug, anderswo 225 Euro.</a:t>
             </a:r>
           </a:p>
         </p:txBody>
@@ -1700,7 +1700,7 @@
                 </a:solidFill>
                 <a:latin typeface="DM Sans"/>
               </a:rPr>
-              <a:t>Keine Übersicht über die Ausgaben</a:t>
+              <a:t>Keine Übersicht über die Gesamtausgaben</a:t>
             </a:r>
           </a:p>
           <a:p>
@@ -1722,7 +1722,7 @@
                 </a:solidFill>
                 <a:latin typeface="DM Sans"/>
               </a:rPr>
-              <a:t>Ausgaben nach Lieferant und Warengruppe sind nicht auswertbar.</a:t>
+              <a:t>Ausgaben nach Lieferant und Warengruppe sind heute nicht auswertbar.</a:t>
             </a:r>
           </a:p>
         </p:txBody>
@@ -1966,7 +1966,7 @@
                 </a:solidFill>
                 <a:latin typeface="DM Sans"/>
               </a:rPr>
-              <a:t>•  Eine Anlaufstelle für Werkstatt, Büro und IT (Intake Agent)</a:t>
+              <a:t>•  Eine Anlaufstelle für alle Abteilungen, für Werkstatt, Büro und IT (Intake Agent)</a:t>
             </a:r>
           </a:p>
           <a:p>
@@ -1988,7 +1988,7 @@
                 </a:solidFill>
                 <a:latin typeface="DM Sans"/>
               </a:rPr>
-              <a:t>•  Integrierte Punch-out-Kataloge für die bestehenden Lieferanten</a:t>
+              <a:t>•  Integrierte Punch-out-Kataloge für die bestehenden und langjährigen Lieferanten</a:t>
             </a:r>
           </a:p>
           <a:p>
@@ -2010,7 +2010,7 @@
                 </a:solidFill>
                 <a:latin typeface="DM Sans"/>
               </a:rPr>
-              <a:t>•  Preisvergleich der angebundenen Lieferanten im System (Comparison Agent)</a:t>
+              <a:t>•  Preisvergleich zwischen den angebundenen Lieferanten direkt im System (Comparison Agent)</a:t>
             </a:r>
           </a:p>
           <a:p>
@@ -2032,7 +2032,7 @@
                 </a:solidFill>
                 <a:latin typeface="DM Sans"/>
               </a:rPr>
-              <a:t>•  Kostenstelle und Sachkonto schon bei der Anforderung (Category Agent)</a:t>
+              <a:t>•  Kostenstelle, Sachkonto und Lieferadresse werden bereits bei der Anforderung hinterlegt (Category Agent)</a:t>
             </a:r>
           </a:p>
           <a:p>
@@ -2054,7 +2054,7 @@
                 </a:solidFill>
                 <a:latin typeface="DM Sans"/>
               </a:rPr>
-              <a:t>•  Freigaben nach Wert, Warengruppe und Kostenstelle (Approval Agent)</a:t>
+              <a:t>•  Strukturierte Freigaben nach Wert, Warengruppe und Kostenstelle (Approval Agent)</a:t>
             </a:r>
           </a:p>
         </p:txBody>
@@ -2191,7 +2191,7 @@
                 </a:solidFill>
                 <a:latin typeface="DM Sans"/>
               </a:rPr>
-              <a:t>•  Freigabe direkt aus MS Teams heraus (MS Teams Agent)</a:t>
+              <a:t>•  Freigabe direkt aus MS Teams heraus, ohne Systemwechsel (MS Teams Agent)</a:t>
             </a:r>
           </a:p>
           <a:p>
@@ -2213,7 +2213,7 @@
                 </a:solidFill>
                 <a:latin typeface="DM Sans"/>
               </a:rPr>
-              <a:t>•  Wareneingang mit Lieferschein und Schadensmeldung dokumentieren</a:t>
+              <a:t>•  Wareneingang dokumentieren, inklusive Lieferschein und Schadensmeldung</a:t>
             </a:r>
           </a:p>
           <a:p>
@@ -2235,7 +2235,7 @@
                 </a:solidFill>
                 <a:latin typeface="DM Sans"/>
               </a:rPr>
-              <a:t>•  Bestelldaten an d.velop D3, Rechnungen laufen dunkel durch (Invoice Agent)</a:t>
+              <a:t>•  Übergabe der Bestelldaten an d.velop D3, Rechnungen können dunkel durchlaufen (Invoice Agent)</a:t>
             </a:r>
           </a:p>
           <a:p>
@@ -2257,7 +2257,29 @@
                 </a:solidFill>
                 <a:latin typeface="DM Sans"/>
               </a:rPr>
-              <a:t>•  Ausgaben nach Lieferant und Warengruppe auswerten (Analytics Agent)</a:t>
+              <a:t>•  Auswertung der Ausgaben nach Lieferant, Warengruppe und Zeitraum (Analytics Agent)</a:t>
+            </a:r>
+          </a:p>
+          <a:p>
+            <a:pPr>
+              <a:lnSpc>
+                <a:spcPct val="130000"/>
+              </a:lnSpc>
+              <a:spcBef>
+                <a:spcPts val="0"/>
+              </a:spcBef>
+              <a:spcAft>
+                <a:spcPts val="900"/>
+              </a:spcAft>
+            </a:pPr>
+            <a:r>
+              <a:rPr sz="1300" b="0">
+                <a:solidFill>
+                  <a:srgbClr val="204540"/>
+                </a:solidFill>
+                <a:latin typeface="DM Sans"/>
+              </a:rPr>
+              <a:t>•  Leitplanken im System halten Bestellungen im freigegebenen Rahmen (Compliance Agent)</a:t>
             </a:r>
           </a:p>
         </p:txBody>
@@ -2601,7 +2623,7 @@
                 </a:solidFill>
                 <a:latin typeface="DM Sans"/>
               </a:rPr>
-              <a:t>•  Bedarfe werden direkt im System angefordert (Intake Agent).</a:t>
+              <a:t>•  Bedarfe werden direkt im System angefordert, die Mail ins Sekretariat entfällt (Intake Agent).</a:t>
             </a:r>
           </a:p>
           <a:p>
@@ -2723,7 +2745,7 @@
                 </a:solidFill>
                 <a:latin typeface="DM Sans"/>
               </a:rPr>
-              <a:t>Der Weg vom Bedarf zur Bestellung ist überall derselbe.</a:t>
+              <a:t>Der Weg vom Bedarf zur Bestellung ist in allen Abteilungen derselbe und bleibt kurz.</a:t>
             </a:r>
           </a:p>
         </p:txBody>
@@ -2960,7 +2982,7 @@
                 </a:solidFill>
                 <a:latin typeface="DM Sans"/>
               </a:rPr>
-              <a:t>•  Der Preisvergleich der angebundenen Lieferanten passiert im System (Comparison Agent).</a:t>
+              <a:t>•  Der Preisvergleich zwischen den angebundenen Lieferanten passiert im System (Comparison Agent).</a:t>
             </a:r>
           </a:p>
           <a:p>
@@ -2982,7 +3004,7 @@
                 </a:solidFill>
                 <a:latin typeface="DM Sans"/>
               </a:rPr>
-              <a:t>•  Freigaben laufen regelbasiert, die Bestellung löst danach aus (Approval Agent).</a:t>
+              <a:t>•  Freigaben laufen regelbasiert, die Bestellung löst danach automatisch aus (Approval Agent).</a:t>
             </a:r>
           </a:p>
         </p:txBody>
@@ -3082,7 +3104,7 @@
                 </a:solidFill>
                 <a:latin typeface="DM Sans"/>
               </a:rPr>
-              <a:t>Suchen, Vergleichen und Bestellen von Hand entfällt für die meisten Bestellungen.</a:t>
+              <a:t>Suchen, Vergleichen und Bestellen von Hand entfällt für den Großteil der Bestellungen.</a:t>
             </a:r>
           </a:p>
         </p:txBody>
@@ -3426,7 +3448,7 @@
                 </a:solidFill>
                 <a:latin typeface="DM Sans"/>
               </a:rPr>
-              <a:t>•  Kostenstelle und Sachkonto stehen schon bei der Anforderung fest (Accounting Agent).</a:t>
+              <a:t>•  Kostenstelle, Sachkonto und Lieferadresse stehen schon bei der Anforderung fest (Accounting Agent).</a:t>
             </a:r>
           </a:p>
           <a:p>
@@ -3448,7 +3470,7 @@
                 </a:solidFill>
                 <a:latin typeface="DM Sans"/>
               </a:rPr>
-              <a:t>•  Bestelldaten gehen an d.velop D3, Rechnungen mit Bestellbezug laufen durch (Invoice Agent).</a:t>
+              <a:t>•  Bestelldaten gehen an d.velop D3, Rechnungen mit Bestellbezug laufen ohne Eingriff durch (Invoice Agent).</a:t>
             </a:r>
           </a:p>
         </p:txBody>
@@ -3785,7 +3807,7 @@
                 </a:solidFill>
                 <a:latin typeface="DM Sans"/>
               </a:rPr>
-              <a:t>•  Ausgaben nach Lieferant, Warengruppe und Zeitraum sind auswertbar (Analytics Agent).</a:t>
+              <a:t>•  Ausgaben nach Lieferant, Warengruppe und Zeitraum sind jederzeit auswertbar (Analytics Agent).</a:t>
             </a:r>
           </a:p>
           <a:p>
@@ -3807,7 +3829,7 @@
                 </a:solidFill>
                 <a:latin typeface="DM Sans"/>
               </a:rPr>
-              <a:t>•  Leitplanken halten Bestellungen im freigegebenen Rahmen (Compliance Agent).</a:t>
+              <a:t>•  Leitplanken im System halten Bestellungen im freigegebenen Rahmen (Compliance Agent).</a:t>
             </a:r>
           </a:p>
         </p:txBody>
@@ -3907,7 +3929,7 @@
                 </a:solidFill>
                 <a:latin typeface="DM Sans"/>
               </a:rPr>
-              <a:t>Die Zahlen für den Business Case entstehen im laufenden Betrieb.</a:t>
+              <a:t>Die Zahlen für den Business Case entstehen im laufenden Betrieb, nicht durch Nachfragen.</a:t>
             </a:r>
           </a:p>
         </p:txBody>
@@ -4149,7 +4171,7 @@
                 </a:solidFill>
                 <a:latin typeface="Frank Ruhl Libre"/>
               </a:rPr>
-              <a:t>Wiedmann &amp; Winz erhält einen einheitlichen Bestellweg für alle Abteilungen, der Preisvergleich läuft im System statt von Hand, und die Ausgaben werden auswertbar.</a:t>
+              <a:t>Wiedmann &amp; Winz erhält einen einheitlichen Bestellweg für alle Abteilungen, der Preisvergleich läuft im System statt von Hand, und die Ausgaben werden nach Lieferant und Warengruppe auswertbar.</a:t>
             </a:r>
           </a:p>
         </p:txBody>
@@ -4239,7 +4261,7 @@
                 </a:solidFill>
                 <a:latin typeface="DM Sans"/>
               </a:rPr>
-              <a:t>•  ca. 10 Nutzer würden im System arbeiten (belegt)</a:t>
+              <a:t>•  ca. 10 Nutzer würden im System arbeiten, Schätzung aus dem Gespräch (belegt)</a:t>
             </a:r>
           </a:p>
           <a:p>
@@ -4261,7 +4283,7 @@
                 </a:solidFill>
                 <a:latin typeface="DM Sans"/>
               </a:rPr>
-              <a:t>•  Preisvergleich heute bei 2 bis 4 Anbietern (belegt)</a:t>
+              <a:t>•  Preisvergleich heute bei 2 bis 4 Anbietern pro Bestellung (belegt)</a:t>
             </a:r>
           </a:p>
           <a:p>
@@ -4283,7 +4305,7 @@
                 </a:solidFill>
                 <a:latin typeface="DM Sans"/>
               </a:rPr>
-              <a:t>•  Vorgänge mit 4.000 bis 10.000 Euro genannt (belegt)</a:t>
+              <a:t>•  Einzelne Vorgänge mit 4.000 bis 10.000 Euro Einkaufsvolumen genannt (belegt)</a:t>
             </a:r>
           </a:p>
           <a:p>
@@ -4305,7 +4327,7 @@
                 </a:solidFill>
                 <a:latin typeface="DM Sans"/>
               </a:rPr>
-              <a:t>•  Einsparung durch Bündelung und Preisvergleich (annahme)</a:t>
+              <a:t>•  Einsparung durch Bündelung und systemgestützten Preisvergleich (annahme)</a:t>
             </a:r>
           </a:p>
         </p:txBody>
@@ -4395,7 +4417,7 @@
                 </a:solidFill>
                 <a:latin typeface="DM Sans"/>
               </a:rPr>
-              <a:t>•  Bestellungen pro Monat und Einkaufsvolumen sind noch offen.</a:t>
+              <a:t>•  Anzahl der Bestellungen pro Monat und indirektes Einkaufsvolumen sind noch offen.</a:t>
             </a:r>
           </a:p>
           <a:p>
@@ -4417,7 +4439,7 @@
                 </a:solidFill>
                 <a:latin typeface="DM Sans"/>
               </a:rPr>
-              <a:t>•  Das angepasste Angebot ohne ERP-Schnittstelle steht aus.</a:t>
+              <a:t>•  Das angepasste Angebot ohne ERP-Schnittstelle steht noch aus.</a:t>
             </a:r>
           </a:p>
           <a:p>
@@ -4439,7 +4461,7 @@
                 </a:solidFill>
                 <a:latin typeface="DM Sans"/>
               </a:rPr>
-              <a:t>•  Ein freier Preisvergleich im Internet ist heute nicht möglich.</a:t>
+              <a:t>•  Ein freier Preisvergleich im offenen Internet ist heute nicht möglich.</a:t>
             </a:r>
           </a:p>
         </p:txBody>
@@ -4532,7 +4554,7 @@
                 </a:solidFill>
                 <a:latin typeface="DM Sans"/>
               </a:rPr>
-              <a:t>Im Testzugang sehen Sie den Ablauf mit Ihren eigenen Bedarfen, im Folgetermin am 24. September ordnen wir die Zahlen ein.</a:t>
+              <a:t>Im Testzugang sehen Sie den Ablauf mit Ihren eigenen Bedarfen, im Folgetermin am 24. September ordnen wir die Zahlen gemeinsam ein.</a:t>
             </a:r>
           </a:p>
         </p:txBody>
